--- a/classes/parte-9-forense-digital-y-respuesta-a-incidentes/209-analisis-de-linea-de-tiempo-timeline/clase-209-presentacion.pptx
+++ b/classes/parte-9-forense-digital-y-respuesta-a-incidentes/209-analisis-de-linea-de-tiempo-timeline/clase-209-presentacion.pptx
@@ -17,6 +17,11 @@
     <p:sldId id="265" r:id="rId16"/>
     <p:sldId id="266" r:id="rId17"/>
     <p:sldId id="267" r:id="rId18"/>
+    <p:sldId id="268" r:id="rId19"/>
+    <p:sldId id="269" r:id="rId20"/>
+    <p:sldId id="270" r:id="rId21"/>
+    <p:sldId id="271" r:id="rId22"/>
+    <p:sldId id="272" r:id="rId23"/>
   </p:sldIdLst>
   <p:sldSz cx="9144000" cy="6858000" type="screen4x3"/>
   <p:notesSz cx="6858000" cy="9144000"/>
@@ -3198,7 +3203,7 @@
                   <a:srgbClr val="0B3D2E"/>
                 </a:solidFill>
               </a:rPr>
-              <a:t>⚠️ Errores comunes</a:t>
+              <a:t>🧰 Herramientas y preparación</a:t>
             </a:r>
           </a:p>
         </p:txBody>
@@ -3236,67 +3241,52 @@
                   <a:srgbClr val="22282E"/>
                 </a:solidFill>
               </a:rPr>
-              <a:t>•  La timeline tiene millones de líneas — No la acotaste. Filtra por ventana y fuentes relevantes.</a:t>
-            </a:r>
-          </a:p>
-          <a:p>
-            <a:pPr>
-              <a:spcAft>
-                <a:spcPts val="600"/>
-              </a:spcAft>
-            </a:pPr>
-            <a:r>
-              <a:rPr sz="1500">
-                <a:solidFill>
-                  <a:srgbClr val="22282E"/>
-                </a:solidFill>
-              </a:rPr>
-              <a:t>•  Tiempos en zonas distintas — Mezcla de UTC y local. Normaliza todo a UTC con --timezone.</a:t>
-            </a:r>
-          </a:p>
-          <a:p>
-            <a:pPr>
-              <a:spcAft>
-                <a:spcPts val="600"/>
-              </a:spcAft>
-            </a:pPr>
-            <a:r>
-              <a:rPr sz="1500">
-                <a:solidFill>
-                  <a:srgbClr val="22282E"/>
-                </a:solidFill>
-              </a:rPr>
-              <a:t>•  log2timeline tarda muchísimo — Imagen grande con todos los parsers. Usa --parsers para acotar.</a:t>
-            </a:r>
-          </a:p>
-          <a:p>
-            <a:pPr>
-              <a:spcAft>
-                <a:spcPts val="600"/>
-              </a:spcAft>
-            </a:pPr>
-            <a:r>
-              <a:rPr sz="1500">
-                <a:solidFill>
-                  <a:srgbClr val="22282E"/>
-                </a:solidFill>
-              </a:rPr>
-              <a:t>•  Eventos que se contradicen — Timestomping. Contrasta $SI vs $FN y $UsnJrnl.</a:t>
-            </a:r>
-          </a:p>
-          <a:p>
-            <a:pPr>
-              <a:spcAft>
-                <a:spcPts val="600"/>
-              </a:spcAft>
-            </a:pPr>
-            <a:r>
-              <a:rPr sz="1500">
-                <a:solidFill>
-                  <a:srgbClr val="22282E"/>
-                </a:solidFill>
-              </a:rPr>
-              <a:t>•  Timesketch no importa el CSV — Formato incorrecto. Exporta con el formato compatible (l2tcsv o jsonline).</a:t>
+              <a:t>•  plaso: log2timeline.py, psort.py, pinfo.py (imagen Docker oficial log2timeline/plaso).</a:t>
+            </a:r>
+          </a:p>
+          <a:p>
+            <a:pPr>
+              <a:spcAft>
+                <a:spcPts val="600"/>
+              </a:spcAft>
+            </a:pPr>
+            <a:r>
+              <a:rPr sz="1500">
+                <a:solidFill>
+                  <a:srgbClr val="22282E"/>
+                </a:solidFill>
+              </a:rPr>
+              <a:t>•  Timesketch: despliegue Docker para análisis colaborativo.</a:t>
+            </a:r>
+          </a:p>
+          <a:p>
+            <a:pPr>
+              <a:spcAft>
+                <a:spcPts val="600"/>
+              </a:spcAft>
+            </a:pPr>
+            <a:r>
+              <a:rPr sz="1500">
+                <a:solidFill>
+                  <a:srgbClr val="22282E"/>
+                </a:solidFill>
+              </a:rPr>
+              <a:t>•  Entrada: una imagen .dd/.E01 propia de las clases anteriores.</a:t>
+            </a:r>
+          </a:p>
+          <a:p>
+            <a:pPr>
+              <a:spcAft>
+                <a:spcPts val="600"/>
+              </a:spcAft>
+            </a:pPr>
+            <a:r>
+              <a:rPr sz="1500">
+                <a:solidFill>
+                  <a:srgbClr val="22282E"/>
+                </a:solidFill>
+              </a:rPr>
+              <a:t>•  Recuerda: trabaja sobre copias, nunca el original.</a:t>
             </a:r>
           </a:p>
         </p:txBody>
@@ -3347,7 +3337,7 @@
                   <a:srgbClr val="0B3D2E"/>
                 </a:solidFill>
               </a:rPr>
-              <a:t>❓ Preguntas frecuentes</a:t>
+              <a:t>🧪 Laboratorio guiado</a:t>
             </a:r>
           </a:p>
         </p:txBody>
@@ -3385,97 +3375,97 @@
                   <a:srgbClr val="22282E"/>
                 </a:solidFill>
               </a:rPr>
-              <a:t>•  ❓ ¿Super-timeline siempre?</a:t>
-            </a:r>
-          </a:p>
-          <a:p>
-            <a:pPr>
-              <a:spcAft>
-                <a:spcPts val="600"/>
-              </a:spcAft>
-            </a:pPr>
-            <a:r>
-              <a:rPr sz="1500">
-                <a:solidFill>
-                  <a:srgbClr val="22282E"/>
-                </a:solidFill>
-              </a:rPr>
-              <a:t>•  No siempre: es potente pero ruidosa. Para casos acotados, una timeline de FS puede bastar.</a:t>
-            </a:r>
-          </a:p>
-          <a:p>
-            <a:pPr>
-              <a:spcAft>
-                <a:spcPts val="600"/>
-              </a:spcAft>
-            </a:pPr>
-            <a:r>
-              <a:rPr sz="1500">
-                <a:solidFill>
-                  <a:srgbClr val="22282E"/>
-                </a:solidFill>
-              </a:rPr>
-              <a:t>•  ❓ ¿Cómo evito ahogarme en datos?</a:t>
-            </a:r>
-          </a:p>
-          <a:p>
-            <a:pPr>
-              <a:spcAft>
-                <a:spcPts val="600"/>
-              </a:spcAft>
-            </a:pPr>
-            <a:r>
-              <a:rPr sz="1500">
-                <a:solidFill>
-                  <a:srgbClr val="22282E"/>
-                </a:solidFill>
-              </a:rPr>
-              <a:t>•  Acota por ventana temporal, filtra por fuentes relevantes y pivotea desde eventos conocidos en vez de leer todo.</a:t>
-            </a:r>
-          </a:p>
-          <a:p>
-            <a:pPr>
-              <a:spcAft>
-                <a:spcPts val="600"/>
-              </a:spcAft>
-            </a:pPr>
-            <a:r>
-              <a:rPr sz="1500">
-                <a:solidFill>
-                  <a:srgbClr val="22282E"/>
-                </a:solidFill>
-              </a:rPr>
-              <a:t>•  ❓ ¿Timesketch es obligatorio?</a:t>
-            </a:r>
-          </a:p>
-          <a:p>
-            <a:pPr>
-              <a:spcAft>
-                <a:spcPts val="600"/>
-              </a:spcAft>
-            </a:pPr>
-            <a:r>
-              <a:rPr sz="1500">
-                <a:solidFill>
-                  <a:srgbClr val="22282E"/>
-                </a:solidFill>
-              </a:rPr>
-              <a:t>•  No, pero facilita el trabajo en equipo, el etiquetado y la búsqueda. Un CSV también sirve para casos pequeños.</a:t>
-            </a:r>
-          </a:p>
-          <a:p>
-            <a:pPr>
-              <a:spcAft>
-                <a:spcPts val="600"/>
-              </a:spcAft>
-            </a:pPr>
-            <a:r>
-              <a:rPr sz="1500">
-                <a:solidFill>
-                  <a:srgbClr val="22282E"/>
-                </a:solidFill>
-              </a:rPr>
-              <a:t>•  ❓ ¿Cómo detecto manipulación de tiempos?</a:t>
+              <a:t>•  Genera el storage de plaso desde la imagen:</a:t>
+            </a:r>
+          </a:p>
+          <a:p>
+            <a:pPr>
+              <a:spcAft>
+                <a:spcPts val="600"/>
+              </a:spcAft>
+            </a:pPr>
+            <a:r>
+              <a:rPr sz="1500">
+                <a:solidFill>
+                  <a:srgbClr val="22282E"/>
+                </a:solidFill>
+              </a:rPr>
+              <a:t>•  Revisa qué se recolectó:</a:t>
+            </a:r>
+          </a:p>
+          <a:p>
+            <a:pPr>
+              <a:spcAft>
+                <a:spcPts val="600"/>
+              </a:spcAft>
+            </a:pPr>
+            <a:r>
+              <a:rPr sz="1500">
+                <a:solidFill>
+                  <a:srgbClr val="22282E"/>
+                </a:solidFill>
+              </a:rPr>
+              <a:t>•  Exporta una super-timeline completa a CSV:</a:t>
+            </a:r>
+          </a:p>
+          <a:p>
+            <a:pPr>
+              <a:spcAft>
+                <a:spcPts val="600"/>
+              </a:spcAft>
+            </a:pPr>
+            <a:r>
+              <a:rPr sz="1500">
+                <a:solidFill>
+                  <a:srgbClr val="22282E"/>
+                </a:solidFill>
+              </a:rPr>
+              <a:t>•  Acota a la ventana del incidente (por ejemplo, un día):</a:t>
+            </a:r>
+          </a:p>
+          <a:p>
+            <a:pPr>
+              <a:spcAft>
+                <a:spcPts val="600"/>
+              </a:spcAft>
+            </a:pPr>
+            <a:r>
+              <a:rPr sz="1500">
+                <a:solidFill>
+                  <a:srgbClr val="22282E"/>
+                </a:solidFill>
+              </a:rPr>
+              <a:t>•  Importa a Timesketch y crea un sketch del caso; etiqueta los eventos clave (ejecución de malware, creación de cuenta, exfiltración).</a:t>
+            </a:r>
+          </a:p>
+          <a:p>
+            <a:pPr>
+              <a:spcAft>
+                <a:spcPts val="600"/>
+              </a:spcAft>
+            </a:pPr>
+            <a:r>
+              <a:rPr sz="1500">
+                <a:solidFill>
+                  <a:srgbClr val="22282E"/>
+                </a:solidFill>
+              </a:rPr>
+              <a:t>•  Pivotea: parte de un artefacto conocido (una ejecución de Prefetch de la clase 205) y examina qué ocurrió en los minutos previos y posteriores.</a:t>
+            </a:r>
+          </a:p>
+          <a:p>
+            <a:pPr>
+              <a:spcAft>
+                <a:spcPts val="600"/>
+              </a:spcAft>
+            </a:pPr>
+            <a:r>
+              <a:rPr sz="1500">
+                <a:solidFill>
+                  <a:srgbClr val="22282E"/>
+                </a:solidFill>
+              </a:rPr>
+              <a:t>•  Busca timestomping: eventos del FS cuyos tiempos no cuadran con logs o con el $UsnJrnl.</a:t>
             </a:r>
           </a:p>
         </p:txBody>
@@ -3526,7 +3516,7 @@
                   <a:srgbClr val="0B3D2E"/>
                 </a:solidFill>
               </a:rPr>
-              <a:t>🔗 Referencias</a:t>
+              <a:t>✍️ Ejercicios</a:t>
             </a:r>
           </a:p>
         </p:txBody>
@@ -3564,56 +3554,757 @@
                   <a:srgbClr val="22282E"/>
                 </a:solidFill>
               </a:rPr>
-              <a:t>•  plaso / log2timeline: &lt;https://plaso.readthedocs.io/&gt;</a:t>
-            </a:r>
-          </a:p>
-          <a:p>
-            <a:pPr>
-              <a:spcAft>
-                <a:spcPts val="600"/>
-              </a:spcAft>
-            </a:pPr>
-            <a:r>
-              <a:rPr sz="1500">
-                <a:solidFill>
-                  <a:srgbClr val="22282E"/>
-                </a:solidFill>
-              </a:rPr>
-              <a:t>•  Timesketch: &lt;https://timesketch.org/&gt;</a:t>
-            </a:r>
-          </a:p>
-          <a:p>
-            <a:pPr>
-              <a:spcAft>
-                <a:spcPts val="600"/>
-              </a:spcAft>
-            </a:pPr>
-            <a:r>
-              <a:rPr sz="1500">
-                <a:solidFill>
-                  <a:srgbClr val="22282E"/>
-                </a:solidFill>
-              </a:rPr>
-              <a:t>•  SANS — Windows Forensic Analysis (FOR508): &lt;https://www.sans.org/&gt;</a:t>
-            </a:r>
-          </a:p>
-          <a:p>
-            <a:pPr>
-              <a:spcAft>
-                <a:spcPts val="600"/>
-              </a:spcAft>
-            </a:pPr>
-            <a:r>
-              <a:rPr sz="1500">
-                <a:solidFill>
-                  <a:srgbClr val="22282E"/>
-                </a:solidFill>
-              </a:rPr>
-              <a:t>•  Carrier, B. — File System Forensic Analysis, Addison-Wesley 2005.</a:t>
-            </a:r>
-          </a:p>
-        </p:txBody>
-      </p:sp>
+              <a:t>•  Genera una super-timeline y cuenta cuántas fuentes agregó plaso.</a:t>
+            </a:r>
+          </a:p>
+          <a:p>
+            <a:pPr>
+              <a:spcAft>
+                <a:spcPts val="600"/>
+              </a:spcAft>
+            </a:pPr>
+            <a:r>
+              <a:rPr sz="1500">
+                <a:solidFill>
+                  <a:srgbClr val="22282E"/>
+                </a:solidFill>
+              </a:rPr>
+              <a:t>•  Filtra la timeline a una ventana de dos horas.</a:t>
+            </a:r>
+          </a:p>
+          <a:p>
+            <a:pPr>
+              <a:spcAft>
+                <a:spcPts val="600"/>
+              </a:spcAft>
+            </a:pPr>
+            <a:r>
+              <a:rPr sz="1500">
+                <a:solidFill>
+                  <a:srgbClr val="22282E"/>
+                </a:solidFill>
+              </a:rPr>
+              <a:t>•  Pivotea desde un evento de login hasta la primera ejecución de malware.</a:t>
+            </a:r>
+          </a:p>
+          <a:p>
+            <a:pPr>
+              <a:spcAft>
+                <a:spcPts val="600"/>
+              </a:spcAft>
+            </a:pPr>
+            <a:r>
+              <a:rPr sz="1500">
+                <a:solidFill>
+                  <a:srgbClr val="22282E"/>
+                </a:solidFill>
+              </a:rPr>
+              <a:t>•  Detecta un caso de timestomping por incoherencia entre fuentes.</a:t>
+            </a:r>
+          </a:p>
+          <a:p>
+            <a:pPr>
+              <a:spcAft>
+                <a:spcPts val="600"/>
+              </a:spcAft>
+            </a:pPr>
+            <a:r>
+              <a:rPr sz="1500">
+                <a:solidFill>
+                  <a:srgbClr val="22282E"/>
+                </a:solidFill>
+              </a:rPr>
+              <a:t>•  Etiqueta en Timesketch los cinco eventos clave de un incidente.</a:t>
+            </a:r>
+          </a:p>
+          <a:p>
+            <a:pPr>
+              <a:spcAft>
+                <a:spcPts val="600"/>
+              </a:spcAft>
+            </a:pPr>
+            <a:r>
+              <a:rPr sz="1500">
+                <a:solidFill>
+                  <a:srgbClr val="22282E"/>
+                </a:solidFill>
+              </a:rPr>
+              <a:t>•  Escribe la narrativa cronológica del incidente en un párrafo.</a:t>
+            </a:r>
+          </a:p>
+        </p:txBody>
+      </p:sp>
+    </p:spTree>
+  </p:cSld>
+  <p:clrMapOvr>
+    <a:masterClrMapping/>
+  </p:clrMapOvr>
+</p:sld>
+</file>
+
+<file path=ppt/slides/slide13.xml><?xml version="1.0" encoding="utf-8"?>
+<p:sld xmlns:a="http://schemas.openxmlformats.org/drawingml/2006/main" xmlns:p="http://schemas.openxmlformats.org/presentationml/2006/main" xmlns:r="http://schemas.openxmlformats.org/officeDocument/2006/relationships">
+  <p:cSld>
+    <p:spTree>
+      <p:nvGrpSpPr>
+        <p:cNvPr id="1" name=""/>
+        <p:cNvGrpSpPr/>
+        <p:nvPr/>
+      </p:nvGrpSpPr>
+      <p:grpSpPr/>
+      <p:sp>
+        <p:nvSpPr>
+          <p:cNvPr id="2" name="TextBox 1"/>
+          <p:cNvSpPr txBox="1"/>
+          <p:nvPr/>
+        </p:nvSpPr>
+        <p:spPr>
+          <a:xfrm>
+            <a:off x="457200" y="320040"/>
+            <a:ext cx="8229600" cy="822960"/>
+          </a:xfrm>
+          <a:prstGeom prst="rect">
+            <a:avLst/>
+          </a:prstGeom>
+          <a:noFill/>
+        </p:spPr>
+        <p:txBody>
+          <a:bodyPr wrap="square">
+            <a:spAutoFit/>
+          </a:bodyPr>
+          <a:lstStyle/>
+          <a:p>
+            <a:r>
+              <a:rPr sz="2600" b="1">
+                <a:solidFill>
+                  <a:srgbClr val="0B3D2E"/>
+                </a:solidFill>
+              </a:rPr>
+              <a:t>📝 Reto verificable</a:t>
+            </a:r>
+          </a:p>
+        </p:txBody>
+      </p:sp>
+      <p:sp>
+        <p:nvSpPr>
+          <p:cNvPr id="3" name="TextBox 2"/>
+          <p:cNvSpPr txBox="1"/>
+          <p:nvPr/>
+        </p:nvSpPr>
+        <p:spPr>
+          <a:xfrm>
+            <a:off x="457200" y="1280160"/>
+            <a:ext cx="8229600" cy="4937760"/>
+          </a:xfrm>
+          <a:prstGeom prst="rect">
+            <a:avLst/>
+          </a:prstGeom>
+          <a:noFill/>
+        </p:spPr>
+        <p:txBody>
+          <a:bodyPr wrap="square">
+            <a:spAutoFit/>
+          </a:bodyPr>
+          <a:lstStyle/>
+          <a:p>
+            <a:pPr>
+              <a:spcAft>
+                <a:spcPts val="600"/>
+              </a:spcAft>
+            </a:pPr>
+            <a:r>
+              <a:rPr sz="1500">
+                <a:solidFill>
+                  <a:srgbClr val="22282E"/>
+                </a:solidFill>
+              </a:rPr>
+              <a:t>•  Construye la super-timeline de una imagen propia con un incidente simulado y entrega la secuencia cronológica desde la entrada del atacante hasta la exfiltración, con al menos seis eventos fechados y…</a:t>
+            </a:r>
+          </a:p>
+          <a:p>
+            <a:pPr>
+              <a:spcAft>
+                <a:spcPts val="600"/>
+              </a:spcAft>
+            </a:pPr>
+            <a:r>
+              <a:rPr sz="1500">
+                <a:solidFill>
+                  <a:srgbClr val="22282E"/>
+                </a:solidFill>
+              </a:rPr>
+              <a:t>•  Criterio de aceptación: tu narrativa incluye seis eventos con fecha/hora UTC, cada uno respaldado por una fuente identificada (FS, registro, log, navegador…), y las fuentes coinciden entre sí (o…</a:t>
+            </a:r>
+          </a:p>
+        </p:txBody>
+      </p:sp>
+    </p:spTree>
+  </p:cSld>
+  <p:clrMapOvr>
+    <a:masterClrMapping/>
+  </p:clrMapOvr>
+</p:sld>
+</file>
+
+<file path=ppt/slides/slide14.xml><?xml version="1.0" encoding="utf-8"?>
+<p:sld xmlns:a="http://schemas.openxmlformats.org/drawingml/2006/main" xmlns:p="http://schemas.openxmlformats.org/presentationml/2006/main" xmlns:r="http://schemas.openxmlformats.org/officeDocument/2006/relationships">
+  <p:cSld>
+    <p:spTree>
+      <p:nvGrpSpPr>
+        <p:cNvPr id="1" name=""/>
+        <p:cNvGrpSpPr/>
+        <p:nvPr/>
+      </p:nvGrpSpPr>
+      <p:grpSpPr/>
+      <p:sp>
+        <p:nvSpPr>
+          <p:cNvPr id="2" name="TextBox 1"/>
+          <p:cNvSpPr txBox="1"/>
+          <p:nvPr/>
+        </p:nvSpPr>
+        <p:spPr>
+          <a:xfrm>
+            <a:off x="457200" y="320040"/>
+            <a:ext cx="8229600" cy="822960"/>
+          </a:xfrm>
+          <a:prstGeom prst="rect">
+            <a:avLst/>
+          </a:prstGeom>
+          <a:noFill/>
+        </p:spPr>
+        <p:txBody>
+          <a:bodyPr wrap="square">
+            <a:spAutoFit/>
+          </a:bodyPr>
+          <a:lstStyle/>
+          <a:p>
+            <a:r>
+              <a:rPr sz="2600" b="1">
+                <a:solidFill>
+                  <a:srgbClr val="0B3D2E"/>
+                </a:solidFill>
+              </a:rPr>
+              <a:t>⚠️ Errores comunes</a:t>
+            </a:r>
+          </a:p>
+        </p:txBody>
+      </p:sp>
+      <p:sp>
+        <p:nvSpPr>
+          <p:cNvPr id="3" name="TextBox 2"/>
+          <p:cNvSpPr txBox="1"/>
+          <p:nvPr/>
+        </p:nvSpPr>
+        <p:spPr>
+          <a:xfrm>
+            <a:off x="457200" y="1280160"/>
+            <a:ext cx="8229600" cy="4937760"/>
+          </a:xfrm>
+          <a:prstGeom prst="rect">
+            <a:avLst/>
+          </a:prstGeom>
+          <a:noFill/>
+        </p:spPr>
+        <p:txBody>
+          <a:bodyPr wrap="square">
+            <a:spAutoFit/>
+          </a:bodyPr>
+          <a:lstStyle/>
+          <a:p>
+            <a:pPr>
+              <a:spcAft>
+                <a:spcPts val="600"/>
+              </a:spcAft>
+            </a:pPr>
+            <a:r>
+              <a:rPr sz="1500">
+                <a:solidFill>
+                  <a:srgbClr val="22282E"/>
+                </a:solidFill>
+              </a:rPr>
+              <a:t>•  La timeline tiene millones de líneas — No la acotaste. Filtra por ventana y fuentes relevantes.</a:t>
+            </a:r>
+          </a:p>
+          <a:p>
+            <a:pPr>
+              <a:spcAft>
+                <a:spcPts val="600"/>
+              </a:spcAft>
+            </a:pPr>
+            <a:r>
+              <a:rPr sz="1500">
+                <a:solidFill>
+                  <a:srgbClr val="22282E"/>
+                </a:solidFill>
+              </a:rPr>
+              <a:t>•  Tiempos en zonas distintas — Mezcla de UTC y local. Normaliza todo a UTC con --timezone.</a:t>
+            </a:r>
+          </a:p>
+          <a:p>
+            <a:pPr>
+              <a:spcAft>
+                <a:spcPts val="600"/>
+              </a:spcAft>
+            </a:pPr>
+            <a:r>
+              <a:rPr sz="1500">
+                <a:solidFill>
+                  <a:srgbClr val="22282E"/>
+                </a:solidFill>
+              </a:rPr>
+              <a:t>•  log2timeline tarda muchísimo — Imagen grande con todos los parsers. Usa --parsers para acotar.</a:t>
+            </a:r>
+          </a:p>
+          <a:p>
+            <a:pPr>
+              <a:spcAft>
+                <a:spcPts val="600"/>
+              </a:spcAft>
+            </a:pPr>
+            <a:r>
+              <a:rPr sz="1500">
+                <a:solidFill>
+                  <a:srgbClr val="22282E"/>
+                </a:solidFill>
+              </a:rPr>
+              <a:t>•  Eventos que se contradicen — Timestomping. Contrasta $SI vs $FN y $UsnJrnl.</a:t>
+            </a:r>
+          </a:p>
+          <a:p>
+            <a:pPr>
+              <a:spcAft>
+                <a:spcPts val="600"/>
+              </a:spcAft>
+            </a:pPr>
+            <a:r>
+              <a:rPr sz="1500">
+                <a:solidFill>
+                  <a:srgbClr val="22282E"/>
+                </a:solidFill>
+              </a:rPr>
+              <a:t>•  Timesketch no importa el CSV — Formato incorrecto. Exporta con el formato compatible (l2tcsv o jsonline).</a:t>
+            </a:r>
+          </a:p>
+        </p:txBody>
+      </p:sp>
+    </p:spTree>
+  </p:cSld>
+  <p:clrMapOvr>
+    <a:masterClrMapping/>
+  </p:clrMapOvr>
+</p:sld>
+</file>
+
+<file path=ppt/slides/slide15.xml><?xml version="1.0" encoding="utf-8"?>
+<p:sld xmlns:a="http://schemas.openxmlformats.org/drawingml/2006/main" xmlns:p="http://schemas.openxmlformats.org/presentationml/2006/main" xmlns:r="http://schemas.openxmlformats.org/officeDocument/2006/relationships">
+  <p:cSld>
+    <p:spTree>
+      <p:nvGrpSpPr>
+        <p:cNvPr id="1" name=""/>
+        <p:cNvGrpSpPr/>
+        <p:nvPr/>
+      </p:nvGrpSpPr>
+      <p:grpSpPr/>
+      <p:sp>
+        <p:nvSpPr>
+          <p:cNvPr id="2" name="TextBox 1"/>
+          <p:cNvSpPr txBox="1"/>
+          <p:nvPr/>
+        </p:nvSpPr>
+        <p:spPr>
+          <a:xfrm>
+            <a:off x="457200" y="320040"/>
+            <a:ext cx="8229600" cy="822960"/>
+          </a:xfrm>
+          <a:prstGeom prst="rect">
+            <a:avLst/>
+          </a:prstGeom>
+          <a:noFill/>
+        </p:spPr>
+        <p:txBody>
+          <a:bodyPr wrap="square">
+            <a:spAutoFit/>
+          </a:bodyPr>
+          <a:lstStyle/>
+          <a:p>
+            <a:r>
+              <a:rPr sz="2600" b="1">
+                <a:solidFill>
+                  <a:srgbClr val="0B3D2E"/>
+                </a:solidFill>
+              </a:rPr>
+              <a:t>❓ Preguntas frecuentes</a:t>
+            </a:r>
+          </a:p>
+        </p:txBody>
+      </p:sp>
+      <p:sp>
+        <p:nvSpPr>
+          <p:cNvPr id="3" name="TextBox 2"/>
+          <p:cNvSpPr txBox="1"/>
+          <p:nvPr/>
+        </p:nvSpPr>
+        <p:spPr>
+          <a:xfrm>
+            <a:off x="457200" y="1280160"/>
+            <a:ext cx="8229600" cy="4937760"/>
+          </a:xfrm>
+          <a:prstGeom prst="rect">
+            <a:avLst/>
+          </a:prstGeom>
+          <a:noFill/>
+        </p:spPr>
+        <p:txBody>
+          <a:bodyPr wrap="square">
+            <a:spAutoFit/>
+          </a:bodyPr>
+          <a:lstStyle/>
+          <a:p>
+            <a:pPr>
+              <a:spcAft>
+                <a:spcPts val="600"/>
+              </a:spcAft>
+            </a:pPr>
+            <a:r>
+              <a:rPr sz="1500">
+                <a:solidFill>
+                  <a:srgbClr val="22282E"/>
+                </a:solidFill>
+              </a:rPr>
+              <a:t>•  ❓ ¿Super-timeline siempre?</a:t>
+            </a:r>
+          </a:p>
+          <a:p>
+            <a:pPr>
+              <a:spcAft>
+                <a:spcPts val="600"/>
+              </a:spcAft>
+            </a:pPr>
+            <a:r>
+              <a:rPr sz="1500">
+                <a:solidFill>
+                  <a:srgbClr val="22282E"/>
+                </a:solidFill>
+              </a:rPr>
+              <a:t>•  No siempre: es potente pero ruidosa. Para casos acotados, una timeline de FS puede bastar.</a:t>
+            </a:r>
+          </a:p>
+          <a:p>
+            <a:pPr>
+              <a:spcAft>
+                <a:spcPts val="600"/>
+              </a:spcAft>
+            </a:pPr>
+            <a:r>
+              <a:rPr sz="1500">
+                <a:solidFill>
+                  <a:srgbClr val="22282E"/>
+                </a:solidFill>
+              </a:rPr>
+              <a:t>•  ❓ ¿Cómo evito ahogarme en datos?</a:t>
+            </a:r>
+          </a:p>
+          <a:p>
+            <a:pPr>
+              <a:spcAft>
+                <a:spcPts val="600"/>
+              </a:spcAft>
+            </a:pPr>
+            <a:r>
+              <a:rPr sz="1500">
+                <a:solidFill>
+                  <a:srgbClr val="22282E"/>
+                </a:solidFill>
+              </a:rPr>
+              <a:t>•  Acota por ventana temporal, filtra por fuentes relevantes y pivotea desde eventos conocidos en vez de leer todo.</a:t>
+            </a:r>
+          </a:p>
+          <a:p>
+            <a:pPr>
+              <a:spcAft>
+                <a:spcPts val="600"/>
+              </a:spcAft>
+            </a:pPr>
+            <a:r>
+              <a:rPr sz="1500">
+                <a:solidFill>
+                  <a:srgbClr val="22282E"/>
+                </a:solidFill>
+              </a:rPr>
+              <a:t>•  ❓ ¿Timesketch es obligatorio?</a:t>
+            </a:r>
+          </a:p>
+          <a:p>
+            <a:pPr>
+              <a:spcAft>
+                <a:spcPts val="600"/>
+              </a:spcAft>
+            </a:pPr>
+            <a:r>
+              <a:rPr sz="1500">
+                <a:solidFill>
+                  <a:srgbClr val="22282E"/>
+                </a:solidFill>
+              </a:rPr>
+              <a:t>•  No, pero facilita el trabajo en equipo, el etiquetado y la búsqueda. Un CSV también sirve para casos pequeños.</a:t>
+            </a:r>
+          </a:p>
+          <a:p>
+            <a:pPr>
+              <a:spcAft>
+                <a:spcPts val="600"/>
+              </a:spcAft>
+            </a:pPr>
+            <a:r>
+              <a:rPr sz="1500">
+                <a:solidFill>
+                  <a:srgbClr val="22282E"/>
+                </a:solidFill>
+              </a:rPr>
+              <a:t>•  ❓ ¿Cómo detecto manipulación de tiempos?</a:t>
+            </a:r>
+          </a:p>
+        </p:txBody>
+      </p:sp>
+    </p:spTree>
+  </p:cSld>
+  <p:clrMapOvr>
+    <a:masterClrMapping/>
+  </p:clrMapOvr>
+</p:sld>
+</file>
+
+<file path=ppt/slides/slide16.xml><?xml version="1.0" encoding="utf-8"?>
+<p:sld xmlns:a="http://schemas.openxmlformats.org/drawingml/2006/main" xmlns:p="http://schemas.openxmlformats.org/presentationml/2006/main" xmlns:r="http://schemas.openxmlformats.org/officeDocument/2006/relationships">
+  <p:cSld>
+    <p:spTree>
+      <p:nvGrpSpPr>
+        <p:cNvPr id="1" name=""/>
+        <p:cNvGrpSpPr/>
+        <p:nvPr/>
+      </p:nvGrpSpPr>
+      <p:grpSpPr/>
+      <p:sp>
+        <p:nvSpPr>
+          <p:cNvPr id="2" name="TextBox 1"/>
+          <p:cNvSpPr txBox="1"/>
+          <p:nvPr/>
+        </p:nvSpPr>
+        <p:spPr>
+          <a:xfrm>
+            <a:off x="457200" y="320040"/>
+            <a:ext cx="8229600" cy="822960"/>
+          </a:xfrm>
+          <a:prstGeom prst="rect">
+            <a:avLst/>
+          </a:prstGeom>
+          <a:noFill/>
+        </p:spPr>
+        <p:txBody>
+          <a:bodyPr wrap="square">
+            <a:spAutoFit/>
+          </a:bodyPr>
+          <a:lstStyle/>
+          <a:p>
+            <a:r>
+              <a:rPr sz="2600" b="1">
+                <a:solidFill>
+                  <a:srgbClr val="0B3D2E"/>
+                </a:solidFill>
+              </a:rPr>
+              <a:t>🔗 Referencias verificables y alcance</a:t>
+            </a:r>
+          </a:p>
+        </p:txBody>
+      </p:sp>
+      <p:sp>
+        <p:nvSpPr>
+          <p:cNvPr id="3" name="TextBox 2"/>
+          <p:cNvSpPr txBox="1"/>
+          <p:nvPr/>
+        </p:nvSpPr>
+        <p:spPr>
+          <a:xfrm>
+            <a:off x="457200" y="1280160"/>
+            <a:ext cx="8229600" cy="4937760"/>
+          </a:xfrm>
+          <a:prstGeom prst="rect">
+            <a:avLst/>
+          </a:prstGeom>
+          <a:noFill/>
+        </p:spPr>
+        <p:txBody>
+          <a:bodyPr wrap="square">
+            <a:spAutoFit/>
+          </a:bodyPr>
+          <a:lstStyle/>
+          <a:p>
+            <a:pPr>
+              <a:spcAft>
+                <a:spcPts val="600"/>
+              </a:spcAft>
+            </a:pPr>
+            <a:r>
+              <a:rPr sz="1500">
+                <a:solidFill>
+                  <a:srgbClr val="22282E"/>
+                </a:solidFill>
+              </a:rPr>
+              <a:t>•  Plaso User’s Guide: &lt;https://plaso.readthedocs.io/en/latest/sources/user/Users-Guide.html&gt; — documentación oficial del flujo log2timeline, almacén y herramientas de inspección.</a:t>
+            </a:r>
+          </a:p>
+          <a:p>
+            <a:pPr>
+              <a:spcAft>
+                <a:spcPts val="600"/>
+              </a:spcAft>
+            </a:pPr>
+            <a:r>
+              <a:rPr sz="1500">
+                <a:solidFill>
+                  <a:srgbClr val="22282E"/>
+                </a:solidFill>
+              </a:rPr>
+              <a:t>•  Using psort: &lt;https://plaso.readthedocs.io/en/latest/sources/user/Using-psort.html&gt; — referencia oficial de filtrado y exportación; documenta que UTC es la zona de salida predeterminada.</a:t>
+            </a:r>
+          </a:p>
+          <a:p>
+            <a:pPr>
+              <a:spcAft>
+                <a:spcPts val="600"/>
+              </a:spcAft>
+            </a:pPr>
+            <a:r>
+              <a:rPr sz="1500">
+                <a:solidFill>
+                  <a:srgbClr val="22282E"/>
+                </a:solidFill>
+              </a:rPr>
+              <a:t>•  Timesketch Documentation: &lt;https://timesketch.org/&gt; — documentación del proyecto para búsqueda, anotación y colaboración; no sustituye la validación del parser.</a:t>
+            </a:r>
+          </a:p>
+          <a:p>
+            <a:pPr>
+              <a:spcAft>
+                <a:spcPts val="600"/>
+              </a:spcAft>
+            </a:pPr>
+            <a:r>
+              <a:rPr sz="1500">
+                <a:solidFill>
+                  <a:srgbClr val="22282E"/>
+                </a:solidFill>
+              </a:rPr>
+              <a:t>•  The Sleuth Kit: &lt;https://www.sleuthkit.org/sleuthkit/docs.php&gt; — documentación del proyecto para timelines de filesystem y semántica de sus herramientas.</a:t>
+            </a:r>
+          </a:p>
+          <a:p>
+            <a:pPr>
+              <a:spcAft>
+                <a:spcPts val="600"/>
+              </a:spcAft>
+            </a:pPr>
+            <a:r>
+              <a:rPr sz="1500">
+                <a:solidFill>
+                  <a:srgbClr val="22282E"/>
+                </a:solidFill>
+              </a:rPr>
+              <a:t>•  RFC 3227 / BCP 55: &lt;https://www.rfc-editor.org/info/rfc3227/&gt; — guía para recolección y archivo de evidencia; sustenta documentar reloj, zona y deriva.</a:t>
+            </a:r>
+          </a:p>
+          <a:p>
+            <a:pPr>
+              <a:spcAft>
+                <a:spcPts val="600"/>
+              </a:spcAft>
+            </a:pPr>
+            <a:r>
+              <a:rPr sz="1500">
+                <a:solidFill>
+                  <a:srgbClr val="22282E"/>
+                </a:solidFill>
+              </a:rPr>
+              <a:t>•  Carrier, B. — File System Forensic Analysis, Addison-Wesley, 2005: fundamento técnico; sus ejemplos deben contrastarse con versiones actuales de cada filesystem.</a:t>
+            </a:r>
+          </a:p>
+        </p:txBody>
+      </p:sp>
+    </p:spTree>
+  </p:cSld>
+  <p:clrMapOvr>
+    <a:masterClrMapping/>
+  </p:clrMapOvr>
+</p:sld>
+</file>
+
+<file path=ppt/slides/slide17.xml><?xml version="1.0" encoding="utf-8"?>
+<p:sld xmlns:a="http://schemas.openxmlformats.org/drawingml/2006/main" xmlns:p="http://schemas.openxmlformats.org/presentationml/2006/main" xmlns:r="http://schemas.openxmlformats.org/officeDocument/2006/relationships">
+  <p:cSld>
+    <p:spTree>
+      <p:nvGrpSpPr>
+        <p:cNvPr id="1" name=""/>
+        <p:cNvGrpSpPr/>
+        <p:nvPr/>
+      </p:nvGrpSpPr>
+      <p:grpSpPr/>
+      <p:sp>
+        <p:nvSpPr>
+          <p:cNvPr id="2" name="TextBox 1"/>
+          <p:cNvSpPr txBox="1"/>
+          <p:nvPr/>
+        </p:nvSpPr>
+        <p:spPr>
+          <a:xfrm>
+            <a:off x="457200" y="274320"/>
+            <a:ext cx="8229600" cy="640080"/>
+          </a:xfrm>
+          <a:prstGeom prst="rect">
+            <a:avLst/>
+          </a:prstGeom>
+          <a:noFill/>
+        </p:spPr>
+        <p:txBody>
+          <a:bodyPr wrap="square">
+            <a:spAutoFit/>
+          </a:bodyPr>
+          <a:lstStyle/>
+          <a:p>
+            <a:r>
+              <a:rPr sz="2200" b="1">
+                <a:solidFill>
+                  <a:srgbClr val="0B3D2E"/>
+                </a:solidFill>
+              </a:rPr>
+              <a:t>Diagrama de la clase</a:t>
+            </a:r>
+          </a:p>
+        </p:txBody>
+      </p:sp>
+      <p:pic>
+        <p:nvPicPr>
+          <p:cNvPr id="3" name="Picture 2" descr="d37cc315b28ed5ff.png"/>
+          <p:cNvPicPr>
+            <a:picLocks noChangeAspect="1"/>
+          </p:cNvPicPr>
+          <p:nvPr/>
+        </p:nvPicPr>
+        <p:blipFill>
+          <a:blip r:embed="rId2"/>
+          <a:stretch>
+            <a:fillRect/>
+          </a:stretch>
+        </p:blipFill>
+        <p:spPr>
+          <a:xfrm>
+            <a:off x="457200" y="3003804"/>
+            <a:ext cx="8229600" cy="1490472"/>
+          </a:xfrm>
+          <a:prstGeom prst="rect">
+            <a:avLst/>
+          </a:prstGeom>
+        </p:spPr>
+      </p:pic>
     </p:spTree>
   </p:cSld>
   <p:clrMapOvr>
@@ -3698,7 +4389,7 @@
                   <a:srgbClr val="22282E"/>
                 </a:solidFill>
               </a:rPr>
-              <a:t>•  Aprender a construir y analizar super-timelines: la fusión de todos los timestamps de un sistema (sistema de archivos, registro, logs, artefactos) en una única línea de tiempo ordenada. Al terminar podrás usar plaso/log2timeline y Timesketch para reconstruir la secuencia exacta de un incidente.</a:t>
+              <a:t>•  Aprender a construir y analizar super-timelines: la integración de timestamps extraídos de sistema de archivos, registro, logs y aplicaciones en una vista temporal trazable. Al terminar podrás usar…</a:t>
             </a:r>
           </a:p>
         </p:txBody>
@@ -4092,7 +4783,7 @@
                   <a:srgbClr val="0B3D2E"/>
                 </a:solidFill>
               </a:rPr>
-              <a:t>📖 Definiciones y características</a:t>
+              <a:t>🧠 Explicación en profundidad</a:t>
             </a:r>
           </a:p>
         </p:txBody>
@@ -4130,97 +4821,97 @@
                   <a:srgbClr val="22282E"/>
                 </a:solidFill>
               </a:rPr>
-              <a:t>•  Timeline de sistema de archivos: ordena solo los timestamps MACB del FS. Característica: rápida pero limitada.</a:t>
-            </a:r>
-          </a:p>
-          <a:p>
-            <a:pPr>
-              <a:spcAft>
-                <a:spcPts val="600"/>
-              </a:spcAft>
-            </a:pPr>
-            <a:r>
-              <a:rPr sz="1500">
-                <a:solidFill>
-                  <a:srgbClr val="22282E"/>
-                </a:solidFill>
-              </a:rPr>
-              <a:t>•  Super-timeline: fusiona FS, registro, logs, navegador, etc. Característica: visión completa, pero voluminosa y ruidosa.</a:t>
-            </a:r>
-          </a:p>
-          <a:p>
-            <a:pPr>
-              <a:spcAft>
-                <a:spcPts val="600"/>
-              </a:spcAft>
-            </a:pPr>
-            <a:r>
-              <a:rPr sz="1500">
-                <a:solidFill>
-                  <a:srgbClr val="22282E"/>
-                </a:solidFill>
-              </a:rPr>
-              <a:t>•  plaso: framework que produce timelines; log2timeline extrae, psort filtra/exporta. Característica: soporta cientos de parsers.</a:t>
-            </a:r>
-          </a:p>
-          <a:p>
-            <a:pPr>
-              <a:spcAft>
-                <a:spcPts val="600"/>
-              </a:spcAft>
-            </a:pPr>
-            <a:r>
-              <a:rPr sz="1500">
-                <a:solidFill>
-                  <a:srgbClr val="22282E"/>
-                </a:solidFill>
-              </a:rPr>
-              <a:t>•  Plaso storage (.plaso): base intermedia de eventos. Característica: se filtra sin re-procesar la imagen.</a:t>
-            </a:r>
-          </a:p>
-          <a:p>
-            <a:pPr>
-              <a:spcAft>
-                <a:spcPts val="600"/>
-              </a:spcAft>
-            </a:pPr>
-            <a:r>
-              <a:rPr sz="1500">
-                <a:solidFill>
-                  <a:srgbClr val="22282E"/>
-                </a:solidFill>
-              </a:rPr>
-              <a:t>•  Timesketch: plataforma web para analizar y anotar timelines en equipo. Característica: permite etiquetar y buscar a gran escala.</a:t>
-            </a:r>
-          </a:p>
-          <a:p>
-            <a:pPr>
-              <a:spcAft>
-                <a:spcPts val="600"/>
-              </a:spcAft>
-            </a:pPr>
-            <a:r>
-              <a:rPr sz="1500">
-                <a:solidFill>
-                  <a:srgbClr val="22282E"/>
-                </a:solidFill>
-              </a:rPr>
-              <a:t>•  Pivote: saltar de un evento clave a los relacionados en el tiempo. Característica: técnica central del análisis.</a:t>
-            </a:r>
-          </a:p>
-          <a:p>
-            <a:pPr>
-              <a:spcAft>
-                <a:spcPts val="600"/>
-              </a:spcAft>
-            </a:pPr>
-            <a:r>
-              <a:rPr sz="1500">
-                <a:solidFill>
-                  <a:srgbClr val="22282E"/>
-                </a:solidFill>
-              </a:rPr>
-              <a:t>•  Timestomping: alterar timestamps para engañar. Característica: crea incoherencias detectables entre fuentes.</a:t>
+              <a:t>•  Una timeline no es una lista ordenada sin más: integra relojes con semánticas distintas. Tiempo del evento, escritura del registro, adquisición e ingesta pueden divergir. Zona horaria, DST, deriva y…</a:t>
+            </a:r>
+          </a:p>
+          <a:p>
+            <a:pPr>
+              <a:spcAft>
+                <a:spcPts val="600"/>
+              </a:spcAft>
+            </a:pPr>
+            <a:r>
+              <a:rPr sz="1500">
+                <a:solidFill>
+                  <a:srgbClr val="22282E"/>
+                </a:solidFill>
+              </a:rPr>
+              <a:t>•  Una super-timeline facilita pivotes pero amplifica errores de parsers y volumen. Cada fila necesita fuente y parser; varias filas pueden representar una sola acción. Se empieza con hitos confiables…</a:t>
+            </a:r>
+          </a:p>
+          <a:p>
+            <a:pPr>
+              <a:spcAft>
+                <a:spcPts val="600"/>
+              </a:spcAft>
+            </a:pPr>
+            <a:r>
+              <a:rPr sz="1500">
+                <a:solidFill>
+                  <a:srgbClr val="22282E"/>
+                </a:solidFill>
+              </a:rPr>
+              <a:t>•  El tiempo del hecho, el tiempo escrito por una aplicación, el tiempo de modificación del contenedor y el tiempo de adquisición pueden ser distintos. Un servidor puede registrar en UTC, una aplicación…</a:t>
+            </a:r>
+          </a:p>
+          <a:p>
+            <a:pPr>
+              <a:spcAft>
+                <a:spcPts val="600"/>
+              </a:spcAft>
+            </a:pPr>
+            <a:r>
+              <a:rPr sz="1500">
+                <a:solidFill>
+                  <a:srgbClr val="22282E"/>
+                </a:solidFill>
+              </a:rPr>
+              <a:t>•  MACB tampoco significa cuatro observadores independientes. Son categorías de tiempos del sistema de archivos cuya semántica depende del formato y de la operación. Copiar, extraer, renombrar o…</a:t>
+            </a:r>
+          </a:p>
+          <a:p>
+            <a:pPr>
+              <a:spcAft>
+                <a:spcPts val="600"/>
+              </a:spcAft>
+            </a:pPr>
+            <a:r>
+              <a:rPr sz="1500">
+                <a:solidFill>
+                  <a:srgbClr val="22282E"/>
+                </a:solidFill>
+              </a:rPr>
+              <a:t>•  log2timeline.py identifica fuentes y las procesa mediante parsers hacia un archivo .plaso; pinfo.py permite inspeccionar información del procesamiento; psort.py filtra y exporta eventos. Esta…</a:t>
+            </a:r>
+          </a:p>
+          <a:p>
+            <a:pPr>
+              <a:spcAft>
+                <a:spcPts val="600"/>
+              </a:spcAft>
+            </a:pPr>
+            <a:r>
+              <a:rPr sz="1500">
+                <a:solidFill>
+                  <a:srgbClr val="22282E"/>
+                </a:solidFill>
+              </a:rPr>
+              <a:t>•  Habilitar más parsers aumenta cobertura y ruido, y también el tiempo de proceso. Una selección se justifica por sistema, pregunta y ventana. Antes de interpretar millones de filas, se revisan errores…</a:t>
+            </a:r>
+          </a:p>
+          <a:p>
+            <a:pPr>
+              <a:spcAft>
+                <a:spcPts val="600"/>
+              </a:spcAft>
+            </a:pPr>
+            <a:r>
+              <a:rPr sz="1500">
+                <a:solidFill>
+                  <a:srgbClr val="22282E"/>
+                </a:solidFill>
+              </a:rPr>
+              <a:t>•  El análisis parte de un hito de alta confianza —por ejemplo, una autenticación confirmada o una descarga observada— y abre ventanas antes y después. Se agrupan filas que pueden corresponder a una…</a:t>
             </a:r>
           </a:p>
         </p:txBody>
@@ -4271,7 +4962,7 @@
                   <a:srgbClr val="0B3D2E"/>
                 </a:solidFill>
               </a:rPr>
-              <a:t>🧰 Herramientas y preparación</a:t>
+              <a:t>📔 Glosario</a:t>
             </a:r>
           </a:p>
         </p:txBody>
@@ -4309,52 +5000,97 @@
                   <a:srgbClr val="22282E"/>
                 </a:solidFill>
               </a:rPr>
-              <a:t>•  plaso: log2timeline.py, psort.py, pinfo.py (imagen Docker oficial log2timeline/plaso).</a:t>
-            </a:r>
-          </a:p>
-          <a:p>
-            <a:pPr>
-              <a:spcAft>
-                <a:spcPts val="600"/>
-              </a:spcAft>
-            </a:pPr>
-            <a:r>
-              <a:rPr sz="1500">
-                <a:solidFill>
-                  <a:srgbClr val="22282E"/>
-                </a:solidFill>
-              </a:rPr>
-              <a:t>•  Timesketch: despliegue Docker para análisis colaborativo.</a:t>
-            </a:r>
-          </a:p>
-          <a:p>
-            <a:pPr>
-              <a:spcAft>
-                <a:spcPts val="600"/>
-              </a:spcAft>
-            </a:pPr>
-            <a:r>
-              <a:rPr sz="1500">
-                <a:solidFill>
-                  <a:srgbClr val="22282E"/>
-                </a:solidFill>
-              </a:rPr>
-              <a:t>•  Entrada: una imagen .dd/.E01 propia de las clases anteriores.</a:t>
-            </a:r>
-          </a:p>
-          <a:p>
-            <a:pPr>
-              <a:spcAft>
-                <a:spcPts val="600"/>
-              </a:spcAft>
-            </a:pPr>
-            <a:r>
-              <a:rPr sz="1500">
-                <a:solidFill>
-                  <a:srgbClr val="22282E"/>
-                </a:solidFill>
-              </a:rPr>
-              <a:t>•  Recuerda: trabaja sobre copias, nunca el original.</a:t>
+              <a:t>•  Timeline: secuencia temporal de artefactos.</a:t>
+            </a:r>
+          </a:p>
+          <a:p>
+            <a:pPr>
+              <a:spcAft>
+                <a:spcPts val="600"/>
+              </a:spcAft>
+            </a:pPr>
+            <a:r>
+              <a:rPr sz="1500">
+                <a:solidFill>
+                  <a:srgbClr val="22282E"/>
+                </a:solidFill>
+              </a:rPr>
+              <a:t>•  Super-timeline: integración de múltiples fuentes.</a:t>
+            </a:r>
+          </a:p>
+          <a:p>
+            <a:pPr>
+              <a:spcAft>
+                <a:spcPts val="600"/>
+              </a:spcAft>
+            </a:pPr>
+            <a:r>
+              <a:rPr sz="1500">
+                <a:solidFill>
+                  <a:srgbClr val="22282E"/>
+                </a:solidFill>
+              </a:rPr>
+              <a:t>•  Time skew: diferencia entre reloj observado y referencia.</a:t>
+            </a:r>
+          </a:p>
+          <a:p>
+            <a:pPr>
+              <a:spcAft>
+                <a:spcPts val="600"/>
+              </a:spcAft>
+            </a:pPr>
+            <a:r>
+              <a:rPr sz="1500">
+                <a:solidFill>
+                  <a:srgbClr val="22282E"/>
+                </a:solidFill>
+              </a:rPr>
+              <a:t>•  DST: cambio estacional de hora.</a:t>
+            </a:r>
+          </a:p>
+          <a:p>
+            <a:pPr>
+              <a:spcAft>
+                <a:spcPts val="600"/>
+              </a:spcAft>
+            </a:pPr>
+            <a:r>
+              <a:rPr sz="1500">
+                <a:solidFill>
+                  <a:srgbClr val="22282E"/>
+                </a:solidFill>
+              </a:rPr>
+              <a:t>•  Parser: lógica que interpreta un artefacto.</a:t>
+            </a:r>
+          </a:p>
+          <a:p>
+            <a:pPr>
+              <a:spcAft>
+                <a:spcPts val="600"/>
+              </a:spcAft>
+            </a:pPr>
+            <a:r>
+              <a:rPr sz="1500">
+                <a:solidFill>
+                  <a:srgbClr val="22282E"/>
+                </a:solidFill>
+              </a:rPr>
+              <a:t>•  Hito: evento confiable usado como pivote.</a:t>
+            </a:r>
+          </a:p>
+          <a:p>
+            <a:pPr>
+              <a:spcAft>
+                <a:spcPts val="600"/>
+              </a:spcAft>
+            </a:pPr>
+            <a:r>
+              <a:rPr sz="1500">
+                <a:solidFill>
+                  <a:srgbClr val="22282E"/>
+                </a:solidFill>
+              </a:rPr>
+              <a:t>•  Provenance: vínculo de la fila con su fuente.</a:t>
             </a:r>
           </a:p>
         </p:txBody>
@@ -4405,7 +5141,7 @@
                   <a:srgbClr val="0B3D2E"/>
                 </a:solidFill>
               </a:rPr>
-              <a:t>🧪 Laboratorio guiado</a:t>
+              <a:t>📖 Definiciones y características</a:t>
             </a:r>
           </a:p>
         </p:txBody>
@@ -4443,97 +5179,97 @@
                   <a:srgbClr val="22282E"/>
                 </a:solidFill>
               </a:rPr>
-              <a:t>•  Genera el storage de plaso desde la imagen:</a:t>
-            </a:r>
-          </a:p>
-          <a:p>
-            <a:pPr>
-              <a:spcAft>
-                <a:spcPts val="600"/>
-              </a:spcAft>
-            </a:pPr>
-            <a:r>
-              <a:rPr sz="1500">
-                <a:solidFill>
-                  <a:srgbClr val="22282E"/>
-                </a:solidFill>
-              </a:rPr>
-              <a:t>•  log2timeline.py --storage-file caso.plaso imagen.E01</a:t>
-            </a:r>
-          </a:p>
-          <a:p>
-            <a:pPr>
-              <a:spcAft>
-                <a:spcPts val="600"/>
-              </a:spcAft>
-            </a:pPr>
-            <a:r>
-              <a:rPr sz="1500">
-                <a:solidFill>
-                  <a:srgbClr val="22282E"/>
-                </a:solidFill>
-              </a:rPr>
-              <a:t>•  Revisa qué se recolectó:</a:t>
-            </a:r>
-          </a:p>
-          <a:p>
-            <a:pPr>
-              <a:spcAft>
-                <a:spcPts val="600"/>
-              </a:spcAft>
-            </a:pPr>
-            <a:r>
-              <a:rPr sz="1500">
-                <a:solidFill>
-                  <a:srgbClr val="22282E"/>
-                </a:solidFill>
-              </a:rPr>
-              <a:t>•  pinfo.py caso.plaso</a:t>
-            </a:r>
-          </a:p>
-          <a:p>
-            <a:pPr>
-              <a:spcAft>
-                <a:spcPts val="600"/>
-              </a:spcAft>
-            </a:pPr>
-            <a:r>
-              <a:rPr sz="1500">
-                <a:solidFill>
-                  <a:srgbClr val="22282E"/>
-                </a:solidFill>
-              </a:rPr>
-              <a:t>•  Exporta una super-timeline completa a CSV:</a:t>
-            </a:r>
-          </a:p>
-          <a:p>
-            <a:pPr>
-              <a:spcAft>
-                <a:spcPts val="600"/>
-              </a:spcAft>
-            </a:pPr>
-            <a:r>
-              <a:rPr sz="1500">
-                <a:solidFill>
-                  <a:srgbClr val="22282E"/>
-                </a:solidFill>
-              </a:rPr>
-              <a:t>•  psort.py -o l2tcsv -w timeline.csv caso.plaso</a:t>
-            </a:r>
-          </a:p>
-          <a:p>
-            <a:pPr>
-              <a:spcAft>
-                <a:spcPts val="600"/>
-              </a:spcAft>
-            </a:pPr>
-            <a:r>
-              <a:rPr sz="1500">
-                <a:solidFill>
-                  <a:srgbClr val="22282E"/>
-                </a:solidFill>
-              </a:rPr>
-              <a:t>•  Acota a la ventana del incidente (por ejemplo, un día):</a:t>
+              <a:t>•  Timeline de sistema de archivos: ordena solo los timestamps MACB del FS. Característica: rápida pero limitada.</a:t>
+            </a:r>
+          </a:p>
+          <a:p>
+            <a:pPr>
+              <a:spcAft>
+                <a:spcPts val="600"/>
+              </a:spcAft>
+            </a:pPr>
+            <a:r>
+              <a:rPr sz="1500">
+                <a:solidFill>
+                  <a:srgbClr val="22282E"/>
+                </a:solidFill>
+              </a:rPr>
+              <a:t>•  Super-timeline: integra eventos derivados de filesystem, registro, logs, navegador y otras fuentes. Característica: amplía la cobertura, pero conserva vacíos, duplicados y errores de interpretación.</a:t>
+            </a:r>
+          </a:p>
+          <a:p>
+            <a:pPr>
+              <a:spcAft>
+                <a:spcPts val="600"/>
+              </a:spcAft>
+            </a:pPr>
+            <a:r>
+              <a:rPr sz="1500">
+                <a:solidFill>
+                  <a:srgbClr val="22282E"/>
+                </a:solidFill>
+              </a:rPr>
+              <a:t>•  plaso: framework que produce timelines; log2timeline extrae, psort filtra/exporta. Característica: soporta cientos de parsers.</a:t>
+            </a:r>
+          </a:p>
+          <a:p>
+            <a:pPr>
+              <a:spcAft>
+                <a:spcPts val="600"/>
+              </a:spcAft>
+            </a:pPr>
+            <a:r>
+              <a:rPr sz="1500">
+                <a:solidFill>
+                  <a:srgbClr val="22282E"/>
+                </a:solidFill>
+              </a:rPr>
+              <a:t>•  Plaso storage (.plaso): base intermedia de eventos. Característica: se filtra sin re-procesar la imagen.</a:t>
+            </a:r>
+          </a:p>
+          <a:p>
+            <a:pPr>
+              <a:spcAft>
+                <a:spcPts val="600"/>
+              </a:spcAft>
+            </a:pPr>
+            <a:r>
+              <a:rPr sz="1500">
+                <a:solidFill>
+                  <a:srgbClr val="22282E"/>
+                </a:solidFill>
+              </a:rPr>
+              <a:t>•  Timesketch: plataforma web para analizar y anotar timelines en equipo. Característica: permite etiquetar y buscar a gran escala.</a:t>
+            </a:r>
+          </a:p>
+          <a:p>
+            <a:pPr>
+              <a:spcAft>
+                <a:spcPts val="600"/>
+              </a:spcAft>
+            </a:pPr>
+            <a:r>
+              <a:rPr sz="1500">
+                <a:solidFill>
+                  <a:srgbClr val="22282E"/>
+                </a:solidFill>
+              </a:rPr>
+              <a:t>•  Pivote: saltar de un evento clave a los relacionados en el tiempo. Característica: técnica central del análisis.</a:t>
+            </a:r>
+          </a:p>
+          <a:p>
+            <a:pPr>
+              <a:spcAft>
+                <a:spcPts val="600"/>
+              </a:spcAft>
+            </a:pPr>
+            <a:r>
+              <a:rPr sz="1500">
+                <a:solidFill>
+                  <a:srgbClr val="22282E"/>
+                </a:solidFill>
+              </a:rPr>
+              <a:t>•  Timestomping: alterar timestamps para dificultar la reconstrucción. Característica: puede producir incoherencias, aunque estas también admiten causas legítimas y requieren corroboración.</a:t>
             </a:r>
           </a:p>
         </p:txBody>
@@ -4584,7 +5320,7 @@
                   <a:srgbClr val="0B3D2E"/>
                 </a:solidFill>
               </a:rPr>
-              <a:t>✍️ Ejercicios</a:t>
+              <a:t>🔍 Caso razonado — descarga, ejecución y persistencia con relojes distintos</a:t>
             </a:r>
           </a:p>
         </p:txBody>
@@ -4622,82 +5358,22 @@
                   <a:srgbClr val="22282E"/>
                 </a:solidFill>
               </a:rPr>
-              <a:t>•  Genera una super-timeline y cuenta cuántas fuentes agregó plaso.</a:t>
-            </a:r>
-          </a:p>
-          <a:p>
-            <a:pPr>
-              <a:spcAft>
-                <a:spcPts val="600"/>
-              </a:spcAft>
-            </a:pPr>
-            <a:r>
-              <a:rPr sz="1500">
-                <a:solidFill>
-                  <a:srgbClr val="22282E"/>
-                </a:solidFill>
-              </a:rPr>
-              <a:t>•  Filtra la timeline a una ventana de dos horas.</a:t>
-            </a:r>
-          </a:p>
-          <a:p>
-            <a:pPr>
-              <a:spcAft>
-                <a:spcPts val="600"/>
-              </a:spcAft>
-            </a:pPr>
-            <a:r>
-              <a:rPr sz="1500">
-                <a:solidFill>
-                  <a:srgbClr val="22282E"/>
-                </a:solidFill>
-              </a:rPr>
-              <a:t>•  Pivotea desde un evento de login hasta la primera ejecución de malware.</a:t>
-            </a:r>
-          </a:p>
-          <a:p>
-            <a:pPr>
-              <a:spcAft>
-                <a:spcPts val="600"/>
-              </a:spcAft>
-            </a:pPr>
-            <a:r>
-              <a:rPr sz="1500">
-                <a:solidFill>
-                  <a:srgbClr val="22282E"/>
-                </a:solidFill>
-              </a:rPr>
-              <a:t>•  Detecta un caso de timestomping por incoherencia entre fuentes.</a:t>
-            </a:r>
-          </a:p>
-          <a:p>
-            <a:pPr>
-              <a:spcAft>
-                <a:spcPts val="600"/>
-              </a:spcAft>
-            </a:pPr>
-            <a:r>
-              <a:rPr sz="1500">
-                <a:solidFill>
-                  <a:srgbClr val="22282E"/>
-                </a:solidFill>
-              </a:rPr>
-              <a:t>•  Etiqueta en Timesketch los cinco eventos clave de un incidente.</a:t>
-            </a:r>
-          </a:p>
-          <a:p>
-            <a:pPr>
-              <a:spcAft>
-                <a:spcPts val="600"/>
-              </a:spcAft>
-            </a:pPr>
-            <a:r>
-              <a:rPr sz="1500">
-                <a:solidFill>
-                  <a:srgbClr val="22282E"/>
-                </a:solidFill>
-              </a:rPr>
-              <a:t>•  Escribe la narrativa cronológica del incidente en un párrafo.</a:t>
+              <a:t>•  El proxy registra una descarga a las 14:02 UTC; el navegador del portátil conserva 10:02 sin zona explícita; Prefetch muestra actividad dos minutos después y una tarea programada aparece a las 14:06…</a:t>
+            </a:r>
+          </a:p>
+          <a:p>
+            <a:pPr>
+              <a:spcAft>
+                <a:spcPts val="600"/>
+              </a:spcAft>
+            </a:pPr>
+            <a:r>
+              <a:rPr sz="1500">
+                <a:solidFill>
+                  <a:srgbClr val="22282E"/>
+                </a:solidFill>
+              </a:rPr>
+              <a:t>•  La secuencia es consistente con descarga seguida de ejecución y persistencia, pero el historial no prueba que una persona leyó la página y Prefetch no identifica por sí solo quién inició el programa.…</a:t>
             </a:r>
           </a:p>
         </p:txBody>
@@ -4748,7 +5424,7 @@
                   <a:srgbClr val="0B3D2E"/>
                 </a:solidFill>
               </a:rPr>
-              <a:t>📝 Reto verificable</a:t>
+              <a:t>✅ Criterio de dominio</a:t>
             </a:r>
           </a:p>
         </p:txBody>
@@ -4786,22 +5462,7 @@
                   <a:srgbClr val="22282E"/>
                 </a:solidFill>
               </a:rPr>
-              <a:t>•  Construye la super-timeline de una imagen propia con un incidente simulado y entrega la secuencia cronológica desde la entrada del atacante hasta la exfiltración, con al menos seis eventos fechados y correlacionados de fuentes distintas.</a:t>
-            </a:r>
-          </a:p>
-          <a:p>
-            <a:pPr>
-              <a:spcAft>
-                <a:spcPts val="600"/>
-              </a:spcAft>
-            </a:pPr>
-            <a:r>
-              <a:rPr sz="1500">
-                <a:solidFill>
-                  <a:srgbClr val="22282E"/>
-                </a:solidFill>
-              </a:rPr>
-              <a:t>•  Criterio de aceptación: tu narrativa incluye seis eventos con fecha/hora UTC, cada uno respaldado por una fuente identificada (FS, registro, log, navegador…), y las fuentes coinciden entre sí (o explicas las incoherencias por timestomping).</a:t>
+              <a:t>•  Dominas la clase cuando construyes una timeline reproducible, conservas tiempo original y normalizado, documentas zona y desfase, puedes rastrear cada fila hasta fuente y parser, agrupas eventos…</a:t>
             </a:r>
           </a:p>
         </p:txBody>
